--- a/presentacion/Estadistica_Descriptiva_Biobio_FINAL.pptx
+++ b/presentacion/Estadistica_Descriptiva_Biobio_FINAL.pptx
@@ -3358,7 +3358,7 @@
         <p:spPr>
           <a:xfrm>
             <a:off x="822960" y="4709160"/>
-            <a:ext cx="7132320" cy="502920"/>
+            <a:ext cx="8595360" cy="502920"/>
           </a:xfrm>
           <a:prstGeom prst="roundRect">
             <a:avLst/>
@@ -3403,7 +3403,7 @@
         <p:spPr>
           <a:xfrm>
             <a:off x="914400" y="4818888"/>
-            <a:ext cx="6949440" cy="274320"/>
+            <a:ext cx="8412480" cy="274320"/>
           </a:xfrm>
           <a:prstGeom prst="rect">
             <a:avLst/>
@@ -3424,7 +3424,7 @@
                 </a:solidFill>
                 <a:latin typeface="Aptos"/>
               </a:rPr>
-              <a:t>Regla: no usar técnicas que no aparezcan en los laboratorios.</a:t>
+              <a:t>Metodología: Pandas, frecuencias, gráficos, tendencia central, percentiles y dispersión.</a:t>
             </a:r>
           </a:p>
         </p:txBody>

--- a/presentacion/Estadistica_Descriptiva_Biobio_FINAL.pptx
+++ b/presentacion/Estadistica_Descriptiva_Biobio_FINAL.pptx
@@ -3659,7 +3659,7 @@
                 </a:solidFill>
                 <a:latin typeface="Aptos"/>
               </a:rPr>
-              <a:t>Cómo explicar el proyecto en una frase</a:t>
+              <a:t>Resumen del trabajo</a:t>
             </a:r>
           </a:p>
         </p:txBody>
@@ -3694,7 +3694,7 @@
                 </a:solidFill>
                 <a:latin typeface="Aptos"/>
               </a:rPr>
-              <a:t>La defensa debe poder vincular cada paso con un laboratorio del profesor.</a:t>
+              <a:t>Aplicación de estadística descriptiva a la base de matrículas del Biobío 2021.</a:t>
             </a:r>
           </a:p>
         </p:txBody>
@@ -4277,7 +4277,7 @@
                 </a:solidFill>
                 <a:latin typeface="Aptos"/>
               </a:rPr>
-              <a:t>“Tomamos la base de matrículas del Biobío 2021 y aplicamos las herramientas de estadística descriptiva vistas en los laboratorios para responder tres preguntas sobre aranceles, edad e institución.”</a:t>
+              <a:t>Analizamos la base de matrículas del Biobío 2021 mediante herramientas de estadística descriptiva para responder preguntas sobre aranceles, edad y tipo de institución.</a:t>
             </a:r>
           </a:p>
         </p:txBody>
@@ -4357,7 +4357,7 @@
                 </a:solidFill>
                 <a:latin typeface="Aptos"/>
               </a:rPr>
-              <a:t>Si preguntan “¿por qué hicieron esto?”, mostramos el laboratorio donde se enseñó.</a:t>
+              <a:t>Las herramientas utilizadas corresponden a los contenidos de los laboratorios 0 al 5.</a:t>
             </a:r>
           </a:p>
         </p:txBody>
